--- a/Final SIH 2026 (1).pptx
+++ b/Final SIH 2026 (1).pptx
@@ -7356,7 +7356,7 @@
               </a:spcAft>
             </a:pPr>
             <a:r>
-              <a:rPr sz="1500" b="0" dirty="0">
+              <a:rPr sz="1250" b="0" dirty="0">
                 <a:latin typeface="+mn-lt"/>
               </a:rPr>
               <a:t>• Fully working prototype already built and tested end-to-end (scan → redact → send → decide → execute) on a real demo form</a:t>
@@ -7369,19 +7369,19 @@
               </a:spcAft>
             </a:pPr>
             <a:r>
-              <a:rPr sz="1500" b="0" dirty="0">
+              <a:rPr sz="1250" b="0" dirty="0">
                 <a:latin typeface="+mn-lt"/>
               </a:rPr>
               <a:t>• No heavy infrastructure needed — runs entirely on </a:t>
             </a:r>
             <a:r>
-              <a:rPr sz="1500" b="0" dirty="0" err="1">
+              <a:rPr sz="1250" b="0" dirty="0" err="1">
                 <a:latin typeface="+mn-lt"/>
               </a:rPr>
               <a:t>localhost</a:t>
             </a:r>
             <a:r>
-              <a:rPr sz="1500" b="0" dirty="0">
+              <a:rPr sz="1250" b="0" dirty="0">
                 <a:latin typeface="+mn-lt"/>
               </a:rPr>
               <a:t>, no cloud costs, no GPU required</a:t>
@@ -7394,19 +7394,19 @@
               </a:spcAft>
             </a:pPr>
             <a:r>
-              <a:rPr sz="1500" b="0" dirty="0">
+              <a:rPr sz="1250" b="0" dirty="0">
                 <a:latin typeface="+mn-lt"/>
               </a:rPr>
               <a:t>• Uses only mature, well-supported tech (Chrome Extensions API, </a:t>
             </a:r>
             <a:r>
-              <a:rPr sz="1500" b="0" dirty="0" err="1">
+              <a:rPr sz="1250" b="0" dirty="0" err="1">
                 <a:latin typeface="+mn-lt"/>
               </a:rPr>
               <a:t>FastAPI</a:t>
             </a:r>
             <a:r>
-              <a:rPr sz="1500" b="0" dirty="0">
+              <a:rPr sz="1250" b="0" dirty="0">
                 <a:latin typeface="+mn-lt"/>
               </a:rPr>
               <a:t>, optional local LLM runtimes)</a:t>
@@ -7432,7 +7432,7 @@
               </a:spcAft>
             </a:pPr>
             <a:r>
-              <a:rPr sz="1500" b="0" dirty="0">
+              <a:rPr sz="1250" b="0" dirty="0">
                 <a:latin typeface="+mn-lt"/>
               </a:rPr>
               <a:t>• Name/address detection is label-based heuristic, not true NER — may miss unlabeled free-text PII</a:t>
@@ -7445,19 +7445,19 @@
               </a:spcAft>
             </a:pPr>
             <a:r>
-              <a:rPr sz="1500" b="0" dirty="0">
+              <a:rPr sz="1250" b="0" dirty="0">
                 <a:latin typeface="+mn-lt"/>
               </a:rPr>
               <a:t>• Small local LLMs (0.5B–1B </a:t>
             </a:r>
             <a:r>
-              <a:rPr sz="1500" b="0" dirty="0" err="1">
+              <a:rPr sz="1250" b="0" dirty="0" err="1">
                 <a:latin typeface="+mn-lt"/>
               </a:rPr>
               <a:t>params</a:t>
             </a:r>
             <a:r>
-              <a:rPr sz="1500" b="0" dirty="0">
+              <a:rPr sz="1250" b="0" dirty="0">
                 <a:latin typeface="+mn-lt"/>
               </a:rPr>
               <a:t>) can be slow or occasionally produce malformed output</a:t>
@@ -7470,19 +7470,19 @@
               </a:spcAft>
             </a:pPr>
             <a:r>
-              <a:rPr sz="1500" b="0" dirty="0">
+              <a:rPr sz="1250" b="0" dirty="0">
                 <a:latin typeface="+mn-lt"/>
               </a:rPr>
               <a:t>• Pattern-based PII checks (</a:t>
             </a:r>
             <a:r>
-              <a:rPr sz="1500" b="0" dirty="0" err="1">
+              <a:rPr sz="1250" b="0" dirty="0" err="1">
                 <a:latin typeface="+mn-lt"/>
               </a:rPr>
               <a:t>Aadhaar</a:t>
             </a:r>
             <a:r>
-              <a:rPr sz="1500" b="0" dirty="0">
+              <a:rPr sz="1250" b="0" dirty="0">
                 <a:latin typeface="+mn-lt"/>
               </a:rPr>
               <a:t>/PAN/card) are shape-based, not checksum-validated</a:t>
@@ -7495,7 +7495,7 @@
               </a:spcAft>
             </a:pPr>
             <a:r>
-              <a:rPr sz="1500" b="0" dirty="0">
+              <a:rPr sz="1250" b="0" dirty="0">
                 <a:latin typeface="+mn-lt"/>
               </a:rPr>
               <a:t>• No authentication on the local server (acceptable for a local prototype, would need hardening for production)</a:t>
@@ -7521,7 +7521,7 @@
               </a:spcAft>
             </a:pPr>
             <a:r>
-              <a:rPr sz="1500" b="0" dirty="0">
+              <a:rPr sz="1250" b="0" dirty="0">
                 <a:latin typeface="+mn-lt"/>
               </a:rPr>
               <a:t>• Rule-based fallback guarantees the agent never breaks even if the LLM fails or is absent</a:t>
@@ -7534,7 +7534,7 @@
               </a:spcAft>
             </a:pPr>
             <a:r>
-              <a:rPr sz="1500" b="0" dirty="0">
+              <a:rPr sz="1250" b="0" dirty="0">
                 <a:latin typeface="+mn-lt"/>
               </a:rPr>
               <a:t>• Server-side re-validation (defense-in-depth) catches any client-side redaction gaps</a:t>
@@ -7547,10 +7547,10 @@
               </a:spcAft>
             </a:pPr>
             <a:r>
-              <a:rPr sz="1500" b="0" dirty="0">
+              <a:rPr sz="1250" b="0" dirty="0">
                 <a:latin typeface="+mn-lt"/>
               </a:rPr>
-              <a:t>• Roadmap: upgrade on-device perception from structural DOM analysis to a lightweight local vision model (e.g. a small ViT) for pixel-level screen understanding, plus real NER for name/address, checksum validation (Luhn, Aadhaar Verhoeff), and auth for non-local deployment</a:t>
+              <a:t>• Roadmap: upgrade to a lightweight local vision model for pixel-level screen understanding, plus real NER, checksum validation, and auth for non-local deployment</a:t>
             </a:r>
           </a:p>
         </p:txBody>
@@ -7784,6 +7784,30 @@
           <a:xfrm>
             <a:off x="9780086" y="1500"/>
             <a:ext cx="2249850" cy="1062337"/>
+          </a:xfrm>
+          <a:prstGeom prst="rect">
+            <a:avLst/>
+          </a:prstGeom>
+        </p:spPr>
+      </p:pic>
+      <p:pic>
+        <p:nvPicPr>
+          <p:cNvPr id="17411" name="Picture 17410" descr="image.png"/>
+          <p:cNvPicPr>
+            <a:picLocks noChangeAspect="1"/>
+          </p:cNvPicPr>
+          <p:nvPr/>
+        </p:nvPicPr>
+        <p:blipFill>
+          <a:blip r:embed="rId4"/>
+          <a:stretch>
+            <a:fillRect/>
+          </a:stretch>
+        </p:blipFill>
+        <p:spPr>
+          <a:xfrm>
+            <a:off x="4102250" y="5450000"/>
+            <a:ext cx="3987499" cy="870000"/>
           </a:xfrm>
           <a:prstGeom prst="rect">
             <a:avLst/>
